--- a/For System administrators/4. Web Server/Apache/Настройка Web-server Apache.pptx
+++ b/For System administrators/4. Web Server/Apache/Настройка Web-server Apache.pptx
@@ -303,7 +303,7 @@
           <a:p>
             <a:fld id="{B4C71EC6-210F-42DE-9C53-41977AD35B3D}" type="datetimeFigureOut">
               <a:rPr lang="ru-RU" smtClean="0"/>
-              <a:t>18.03.2025</a:t>
+              <a:t>17.10.2026</a:t>
             </a:fld>
             <a:endParaRPr lang="ru-RU"/>
           </a:p>
@@ -468,7 +468,7 @@
           <a:p>
             <a:fld id="{B4C71EC6-210F-42DE-9C53-41977AD35B3D}" type="datetimeFigureOut">
               <a:rPr lang="ru-RU" smtClean="0"/>
-              <a:t>18.03.2025</a:t>
+              <a:t>17.10.2026</a:t>
             </a:fld>
             <a:endParaRPr lang="ru-RU"/>
           </a:p>
@@ -643,7 +643,7 @@
           <a:p>
             <a:fld id="{B4C71EC6-210F-42DE-9C53-41977AD35B3D}" type="datetimeFigureOut">
               <a:rPr lang="ru-RU" smtClean="0"/>
-              <a:t>18.03.2025</a:t>
+              <a:t>17.10.2026</a:t>
             </a:fld>
             <a:endParaRPr lang="ru-RU"/>
           </a:p>
@@ -808,7 +808,7 @@
           <a:p>
             <a:fld id="{B4C71EC6-210F-42DE-9C53-41977AD35B3D}" type="datetimeFigureOut">
               <a:rPr lang="ru-RU" smtClean="0"/>
-              <a:t>18.03.2025</a:t>
+              <a:t>17.10.2026</a:t>
             </a:fld>
             <a:endParaRPr lang="ru-RU"/>
           </a:p>
@@ -1049,7 +1049,7 @@
           <a:p>
             <a:fld id="{B4C71EC6-210F-42DE-9C53-41977AD35B3D}" type="datetimeFigureOut">
               <a:rPr lang="ru-RU" smtClean="0"/>
-              <a:t>18.03.2025</a:t>
+              <a:t>17.10.2026</a:t>
             </a:fld>
             <a:endParaRPr lang="ru-RU"/>
           </a:p>
@@ -1332,7 +1332,7 @@
           <a:p>
             <a:fld id="{B4C71EC6-210F-42DE-9C53-41977AD35B3D}" type="datetimeFigureOut">
               <a:rPr lang="ru-RU" smtClean="0"/>
-              <a:t>18.03.2025</a:t>
+              <a:t>17.10.2026</a:t>
             </a:fld>
             <a:endParaRPr lang="ru-RU"/>
           </a:p>
@@ -1749,7 +1749,7 @@
           <a:p>
             <a:fld id="{B4C71EC6-210F-42DE-9C53-41977AD35B3D}" type="datetimeFigureOut">
               <a:rPr lang="ru-RU" smtClean="0"/>
-              <a:t>18.03.2025</a:t>
+              <a:t>17.10.2026</a:t>
             </a:fld>
             <a:endParaRPr lang="ru-RU"/>
           </a:p>
@@ -1862,7 +1862,7 @@
           <a:p>
             <a:fld id="{B4C71EC6-210F-42DE-9C53-41977AD35B3D}" type="datetimeFigureOut">
               <a:rPr lang="ru-RU" smtClean="0"/>
-              <a:t>18.03.2025</a:t>
+              <a:t>17.10.2026</a:t>
             </a:fld>
             <a:endParaRPr lang="ru-RU"/>
           </a:p>
@@ -1952,7 +1952,7 @@
           <a:p>
             <a:fld id="{B4C71EC6-210F-42DE-9C53-41977AD35B3D}" type="datetimeFigureOut">
               <a:rPr lang="ru-RU" smtClean="0"/>
-              <a:t>18.03.2025</a:t>
+              <a:t>17.10.2026</a:t>
             </a:fld>
             <a:endParaRPr lang="ru-RU"/>
           </a:p>
@@ -2224,7 +2224,7 @@
           <a:p>
             <a:fld id="{B4C71EC6-210F-42DE-9C53-41977AD35B3D}" type="datetimeFigureOut">
               <a:rPr lang="ru-RU" smtClean="0"/>
-              <a:t>18.03.2025</a:t>
+              <a:t>17.10.2026</a:t>
             </a:fld>
             <a:endParaRPr lang="ru-RU"/>
           </a:p>
@@ -2472,7 +2472,7 @@
           <a:p>
             <a:fld id="{B4C71EC6-210F-42DE-9C53-41977AD35B3D}" type="datetimeFigureOut">
               <a:rPr lang="ru-RU" smtClean="0"/>
-              <a:t>18.03.2025</a:t>
+              <a:t>17.10.2026</a:t>
             </a:fld>
             <a:endParaRPr lang="ru-RU"/>
           </a:p>
@@ -2680,7 +2680,7 @@
           <a:p>
             <a:fld id="{B4C71EC6-210F-42DE-9C53-41977AD35B3D}" type="datetimeFigureOut">
               <a:rPr lang="ru-RU" smtClean="0"/>
-              <a:t>18.03.2025</a:t>
+              <a:t>17.10.2026</a:t>
             </a:fld>
             <a:endParaRPr lang="ru-RU"/>
           </a:p>
@@ -3066,21 +3066,61 @@
           <a:lstStyle/>
           <a:p>
             <a:r>
-              <a:rPr lang="ru-RU" dirty="0"/>
+              <a:rPr lang="ru-RU" dirty="0">
+                <a:effectLst>
+                  <a:outerShdw blurRad="38100" dist="38100" dir="2700000" algn="tl">
+                    <a:srgbClr val="000000">
+                      <a:alpha val="43137"/>
+                    </a:srgbClr>
+                  </a:outerShdw>
+                </a:effectLst>
+              </a:rPr>
               <a:t>Настройка </a:t>
             </a:r>
             <a:r>
-              <a:rPr lang="en-US" dirty="0" smtClean="0"/>
+              <a:rPr lang="en-US" dirty="0" smtClean="0">
+                <a:effectLst>
+                  <a:outerShdw blurRad="38100" dist="38100" dir="2700000" algn="tl">
+                    <a:srgbClr val="000000">
+                      <a:alpha val="43137"/>
+                    </a:srgbClr>
+                  </a:outerShdw>
+                </a:effectLst>
+              </a:rPr>
               <a:t>Web-Server</a:t>
             </a:r>
             <a:br>
-              <a:rPr lang="en-US" dirty="0" smtClean="0"/>
+              <a:rPr lang="en-US" dirty="0" smtClean="0">
+                <a:effectLst>
+                  <a:outerShdw blurRad="38100" dist="38100" dir="2700000" algn="tl">
+                    <a:srgbClr val="000000">
+                      <a:alpha val="43137"/>
+                    </a:srgbClr>
+                  </a:outerShdw>
+                </a:effectLst>
+              </a:rPr>
             </a:br>
             <a:r>
-              <a:rPr lang="en-US" dirty="0" smtClean="0"/>
+              <a:rPr lang="en-US" dirty="0" smtClean="0">
+                <a:effectLst>
+                  <a:outerShdw blurRad="38100" dist="38100" dir="2700000" algn="tl">
+                    <a:srgbClr val="000000">
+                      <a:alpha val="43137"/>
+                    </a:srgbClr>
+                  </a:outerShdw>
+                </a:effectLst>
+              </a:rPr>
               <a:t>Apache</a:t>
             </a:r>
-            <a:endParaRPr lang="ru-RU" dirty="0"/>
+            <a:endParaRPr lang="ru-RU" dirty="0">
+              <a:effectLst>
+                <a:outerShdw blurRad="38100" dist="38100" dir="2700000" algn="tl">
+                  <a:srgbClr val="000000">
+                    <a:alpha val="43137"/>
+                  </a:srgbClr>
+                </a:outerShdw>
+              </a:effectLst>
+            </a:endParaRPr>
           </a:p>
         </p:txBody>
       </p:sp>
@@ -3682,15 +3722,7 @@
             </a:br>
             <a:r>
               <a:rPr lang="ru-RU" dirty="0" smtClean="0"/>
-              <a:t>А </a:t>
-            </a:r>
-            <a:r>
-              <a:rPr lang="ru-RU" dirty="0" smtClean="0"/>
-              <a:t>нам </a:t>
-            </a:r>
-            <a:r>
-              <a:rPr lang="ru-RU" dirty="0" smtClean="0"/>
-              <a:t>нужно немного больше прав</a:t>
+              <a:t>А нам нужно немного больше прав</a:t>
             </a:r>
             <a:br>
               <a:rPr lang="ru-RU" dirty="0" smtClean="0"/>
